--- a/Microkernel_Mundial.pptx
+++ b/Microkernel_Mundial.pptx
@@ -5,7 +5,7 @@
     <p:sldMasterId id="2147483648" r:id="rId1"/>
   </p:sldMasterIdLst>
   <p:notesMasterIdLst>
-    <p:notesMasterId r:id="rId11"/>
+    <p:notesMasterId r:id="rId12"/>
   </p:notesMasterIdLst>
   <p:sldIdLst>
     <p:sldId id="256" r:id="rId2"/>
@@ -16,7 +16,8 @@
     <p:sldId id="261" r:id="rId7"/>
     <p:sldId id="262" r:id="rId8"/>
     <p:sldId id="263" r:id="rId9"/>
-    <p:sldId id="266" r:id="rId10"/>
+    <p:sldId id="268" r:id="rId10"/>
+    <p:sldId id="267" r:id="rId11"/>
   </p:sldIdLst>
   <p:sldSz cx="12192000" cy="6858000"/>
   <p:notesSz cx="6858000" cy="12192000"/>
@@ -273,6 +274,13 @@
           </p:nvPr>
         </p:nvSpPr>
         <p:spPr/>
+        <p:txBody>
+          <a:bodyPr/>
+          <a:lstStyle/>
+          <a:p>
+            <a:endParaRPr lang="en-US"/>
+          </a:p>
+        </p:txBody>
       </p:sp>
       <p:sp>
         <p:nvSpPr>
@@ -323,6 +331,124 @@
     <p:extLst>
       <p:ext uri="{BB962C8B-B14F-4D97-AF65-F5344CB8AC3E}">
         <p14:creationId xmlns:p14="http://schemas.microsoft.com/office/powerpoint/2010/main" val="1024086991"/>
+      </p:ext>
+    </p:extLst>
+  </p:cSld>
+  <p:clrMapOvr>
+    <a:masterClrMapping/>
+  </p:clrMapOvr>
+</p:notes>
+</file>
+
+<file path=ppt/notesSlides/notesSlide10.xml><?xml version="1.0" encoding="utf-8"?>
+<p:notes xmlns:a="http://schemas.openxmlformats.org/drawingml/2006/main" xmlns:r="http://schemas.openxmlformats.org/officeDocument/2006/relationships" xmlns:p="http://schemas.openxmlformats.org/presentationml/2006/main">
+  <p:cSld>
+    <p:spTree>
+      <p:nvGrpSpPr>
+        <p:cNvPr id="1" name="">
+          <a:extLst>
+            <a:ext uri="{FF2B5EF4-FFF2-40B4-BE49-F238E27FC236}">
+              <a16:creationId xmlns:a16="http://schemas.microsoft.com/office/drawing/2014/main" id="{F9C5650C-B087-6F1B-0E3C-C95DE0C79B73}"/>
+            </a:ext>
+          </a:extLst>
+        </p:cNvPr>
+        <p:cNvGrpSpPr/>
+        <p:nvPr/>
+      </p:nvGrpSpPr>
+      <p:grpSpPr>
+        <a:xfrm>
+          <a:off x="0" y="0"/>
+          <a:ext cx="0" cy="0"/>
+          <a:chOff x="0" y="0"/>
+          <a:chExt cx="0" cy="0"/>
+        </a:xfrm>
+      </p:grpSpPr>
+      <p:sp>
+        <p:nvSpPr>
+          <p:cNvPr id="2" name="Slide Image Placeholder 1">
+            <a:extLst>
+              <a:ext uri="{FF2B5EF4-FFF2-40B4-BE49-F238E27FC236}">
+                <a16:creationId xmlns:a16="http://schemas.microsoft.com/office/drawing/2014/main" id="{37DAB7F0-49C1-5A57-1C04-48F5A36C8B55}"/>
+              </a:ext>
+            </a:extLst>
+          </p:cNvPr>
+          <p:cNvSpPr>
+            <a:spLocks noGrp="1" noRot="1" noChangeAspect="1"/>
+          </p:cNvSpPr>
+          <p:nvPr>
+            <p:ph type="sldImg"/>
+          </p:nvPr>
+        </p:nvSpPr>
+        <p:spPr/>
+        <p:txBody>
+          <a:bodyPr/>
+          <a:lstStyle/>
+          <a:p>
+            <a:endParaRPr lang="en-US"/>
+          </a:p>
+        </p:txBody>
+      </p:sp>
+      <p:sp>
+        <p:nvSpPr>
+          <p:cNvPr id="3" name="Notes Placeholder 2">
+            <a:extLst>
+              <a:ext uri="{FF2B5EF4-FFF2-40B4-BE49-F238E27FC236}">
+                <a16:creationId xmlns:a16="http://schemas.microsoft.com/office/drawing/2014/main" id="{D2AC18C5-5B7B-376B-202E-3061D33FACD6}"/>
+              </a:ext>
+            </a:extLst>
+          </p:cNvPr>
+          <p:cNvSpPr>
+            <a:spLocks noGrp="1"/>
+          </p:cNvSpPr>
+          <p:nvPr>
+            <p:ph type="body" idx="1"/>
+          </p:nvPr>
+        </p:nvSpPr>
+        <p:spPr/>
+        <p:txBody>
+          <a:bodyPr/>
+          <a:lstStyle/>
+          <a:p>
+            <a:r>
+              <a:rPr lang="en-US" dirty="0"/>
+              <a:t>Cierre: resumir en una frase el rol de cada capa (nucleo generico, plugins independientes, controller traductor). Agradecer y abrir espacio a preguntas. Si preguntan por que un solo proyecto, usar la respuesta preparada sobre separacion logica vs fisica y mencionar la alternativa de carga dinamica via DLL.</a:t>
+            </a:r>
+          </a:p>
+        </p:txBody>
+      </p:sp>
+      <p:sp>
+        <p:nvSpPr>
+          <p:cNvPr id="4" name="Slide Number Placeholder 3">
+            <a:extLst>
+              <a:ext uri="{FF2B5EF4-FFF2-40B4-BE49-F238E27FC236}">
+                <a16:creationId xmlns:a16="http://schemas.microsoft.com/office/drawing/2014/main" id="{958AD4B8-8315-EDD6-0DC0-10D4AA63B6BD}"/>
+              </a:ext>
+            </a:extLst>
+          </p:cNvPr>
+          <p:cNvSpPr>
+            <a:spLocks noGrp="1"/>
+          </p:cNvSpPr>
+          <p:nvPr>
+            <p:ph type="sldNum" sz="quarter" idx="10"/>
+          </p:nvPr>
+        </p:nvSpPr>
+        <p:spPr/>
+        <p:txBody>
+          <a:bodyPr/>
+          <a:lstStyle/>
+          <a:p>
+            <a:fld id="{F7021451-1387-4CA6-816F-3879F97B5CBC}" type="slidenum">
+              <a:rPr lang="en-US"/>
+              <a:t>10</a:t>
+            </a:fld>
+            <a:endParaRPr lang="en-US"/>
+          </a:p>
+        </p:txBody>
+      </p:sp>
+    </p:spTree>
+    <p:extLst>
+      <p:ext uri="{BB962C8B-B14F-4D97-AF65-F5344CB8AC3E}">
+        <p14:creationId xmlns:p14="http://schemas.microsoft.com/office/powerpoint/2010/main" val="1727293977"/>
       </p:ext>
     </p:extLst>
   </p:cSld>
@@ -360,6 +486,13 @@
           </p:nvPr>
         </p:nvSpPr>
         <p:spPr/>
+        <p:txBody>
+          <a:bodyPr/>
+          <a:lstStyle/>
+          <a:p>
+            <a:endParaRPr lang="en-US"/>
+          </a:p>
+        </p:txBody>
       </p:sp>
       <p:sp>
         <p:nvSpPr>
@@ -447,6 +580,13 @@
           </p:nvPr>
         </p:nvSpPr>
         <p:spPr/>
+        <p:txBody>
+          <a:bodyPr/>
+          <a:lstStyle/>
+          <a:p>
+            <a:endParaRPr lang="en-US"/>
+          </a:p>
+        </p:txBody>
       </p:sp>
       <p:sp>
         <p:nvSpPr>
@@ -534,6 +674,13 @@
           </p:nvPr>
         </p:nvSpPr>
         <p:spPr/>
+        <p:txBody>
+          <a:bodyPr/>
+          <a:lstStyle/>
+          <a:p>
+            <a:endParaRPr lang="en-US"/>
+          </a:p>
+        </p:txBody>
       </p:sp>
       <p:sp>
         <p:nvSpPr>
@@ -621,6 +768,13 @@
           </p:nvPr>
         </p:nvSpPr>
         <p:spPr/>
+        <p:txBody>
+          <a:bodyPr/>
+          <a:lstStyle/>
+          <a:p>
+            <a:endParaRPr lang="en-US"/>
+          </a:p>
+        </p:txBody>
       </p:sp>
       <p:sp>
         <p:nvSpPr>
@@ -708,6 +862,13 @@
           </p:nvPr>
         </p:nvSpPr>
         <p:spPr/>
+        <p:txBody>
+          <a:bodyPr/>
+          <a:lstStyle/>
+          <a:p>
+            <a:endParaRPr lang="en-US"/>
+          </a:p>
+        </p:txBody>
       </p:sp>
       <p:sp>
         <p:nvSpPr>
@@ -795,6 +956,13 @@
           </p:nvPr>
         </p:nvSpPr>
         <p:spPr/>
+        <p:txBody>
+          <a:bodyPr/>
+          <a:lstStyle/>
+          <a:p>
+            <a:endParaRPr lang="en-US"/>
+          </a:p>
+        </p:txBody>
       </p:sp>
       <p:sp>
         <p:nvSpPr>
@@ -882,6 +1050,13 @@
           </p:nvPr>
         </p:nvSpPr>
         <p:spPr/>
+        <p:txBody>
+          <a:bodyPr/>
+          <a:lstStyle/>
+          <a:p>
+            <a:endParaRPr lang="en-US"/>
+          </a:p>
+        </p:txBody>
       </p:sp>
       <p:sp>
         <p:nvSpPr>
@@ -969,6 +1144,13 @@
           </p:nvPr>
         </p:nvSpPr>
         <p:spPr/>
+        <p:txBody>
+          <a:bodyPr/>
+          <a:lstStyle/>
+          <a:p>
+            <a:endParaRPr lang="en-US"/>
+          </a:p>
+        </p:txBody>
       </p:sp>
       <p:sp>
         <p:nvSpPr>
@@ -987,7 +1169,7 @@
           <a:p>
             <a:r>
               <a:rPr lang="en-US" dirty="0"/>
-              <a:t>Cierre: resumir en una frase el rol de cada capa (nucleo generico, plugins independientes, controller traductor). Agradecer y abrir espacio a preguntas. Si preguntan por que un solo proyecto, usar la respuesta preparada sobre separacion logica vs fisica y mencionar la alternativa de carga dinamica via DLL.</a:t>
+              <a:t>Mencionar brevemente las dos fuentes principales: Richards y Ford para el respaldo teorico del patron Microkernel, y la documentacion oficial de Microsoft Learn para justificar tecnicamente el uso de inyeccion de dependencias en Program.cs. Ambas son de acceso publico y gratuito.</a:t>
             </a:r>
           </a:p>
         </p:txBody>
@@ -1572,7 +1754,7 @@
         </p:nvSpPr>
         <p:spPr>
           <a:xfrm>
-            <a:off x="822960" y="4133088"/>
+            <a:off x="822960" y="4621355"/>
             <a:ext cx="91440" cy="91440"/>
           </a:xfrm>
           <a:prstGeom prst="ellipse">
@@ -1599,7 +1781,7 @@
         </p:nvSpPr>
         <p:spPr>
           <a:xfrm>
-            <a:off x="1051560" y="4005072"/>
+            <a:off x="1051560" y="4493339"/>
             <a:ext cx="6400800" cy="320040"/>
           </a:xfrm>
           <a:prstGeom prst="rect">
@@ -1638,7 +1820,7 @@
         </p:nvSpPr>
         <p:spPr>
           <a:xfrm>
-            <a:off x="822960" y="4517136"/>
+            <a:off x="822960" y="5005403"/>
             <a:ext cx="91440" cy="91440"/>
           </a:xfrm>
           <a:prstGeom prst="ellipse">
@@ -1665,7 +1847,7 @@
         </p:nvSpPr>
         <p:spPr>
           <a:xfrm>
-            <a:off x="1051560" y="4389120"/>
+            <a:off x="1051560" y="4877387"/>
             <a:ext cx="6400800" cy="320040"/>
           </a:xfrm>
           <a:prstGeom prst="rect">
@@ -1704,7 +1886,7 @@
         </p:nvSpPr>
         <p:spPr>
           <a:xfrm>
-            <a:off x="822960" y="4901184"/>
+            <a:off x="822960" y="5389451"/>
             <a:ext cx="91440" cy="91440"/>
           </a:xfrm>
           <a:prstGeom prst="ellipse">
@@ -1731,7 +1913,7 @@
         </p:nvSpPr>
         <p:spPr>
           <a:xfrm>
-            <a:off x="1051560" y="4773168"/>
+            <a:off x="1051560" y="5261435"/>
             <a:ext cx="6400800" cy="320040"/>
           </a:xfrm>
           <a:prstGeom prst="rect">
@@ -1801,7 +1983,755 @@
           </a:p>
         </p:txBody>
       </p:sp>
+      <p:sp>
+        <p:nvSpPr>
+          <p:cNvPr id="16" name="Text 4">
+            <a:extLst>
+              <a:ext uri="{FF2B5EF4-FFF2-40B4-BE49-F238E27FC236}">
+                <a16:creationId xmlns:a16="http://schemas.microsoft.com/office/drawing/2014/main" id="{C8EF9348-3B1A-EEE4-88BB-0AD2CBC3E638}"/>
+              </a:ext>
+            </a:extLst>
+          </p:cNvPr>
+          <p:cNvSpPr/>
+          <p:nvPr/>
+        </p:nvSpPr>
+        <p:spPr>
+          <a:xfrm>
+            <a:off x="731520" y="3582631"/>
+            <a:ext cx="10058400" cy="502920"/>
+          </a:xfrm>
+          <a:prstGeom prst="rect">
+            <a:avLst/>
+          </a:prstGeom>
+          <a:noFill/>
+          <a:ln/>
+        </p:spPr>
+        <p:txBody>
+          <a:bodyPr wrap="square" lIns="0" tIns="0" rIns="0" bIns="0" rtlCol="0" anchor="ctr"/>
+          <a:lstStyle/>
+          <a:p>
+            <a:pPr marL="0" indent="0">
+              <a:buNone/>
+            </a:pPr>
+            <a:r>
+              <a:rPr lang="en-US" sz="1200" dirty="0">
+                <a:solidFill>
+                  <a:srgbClr val="BFEFE0"/>
+                </a:solidFill>
+                <a:latin typeface="Calibri" pitchFamily="34" charset="0"/>
+                <a:ea typeface="Calibri" pitchFamily="34" charset="-122"/>
+                <a:cs typeface="Calibri" pitchFamily="34" charset="-120"/>
+              </a:rPr>
+              <a:t>Integrantes: José Antonio Julca Díaz</a:t>
+            </a:r>
+            <a:endParaRPr lang="en-US" sz="1200" dirty="0"/>
+          </a:p>
+        </p:txBody>
+      </p:sp>
     </p:spTree>
+  </p:cSld>
+  <p:clrMapOvr>
+    <a:masterClrMapping/>
+  </p:clrMapOvr>
+</p:sld>
+</file>
+
+<file path=ppt/slides/slide10.xml><?xml version="1.0" encoding="utf-8"?>
+<p:sld xmlns:a="http://schemas.openxmlformats.org/drawingml/2006/main" xmlns:r="http://schemas.openxmlformats.org/officeDocument/2006/relationships" xmlns:p="http://schemas.openxmlformats.org/presentationml/2006/main">
+  <p:cSld>
+    <p:bg>
+      <p:bgPr>
+        <a:solidFill>
+          <a:srgbClr val="0B1F2A"/>
+        </a:solidFill>
+        <a:effectLst/>
+      </p:bgPr>
+    </p:bg>
+    <p:spTree>
+      <p:nvGrpSpPr>
+        <p:cNvPr id="1" name="">
+          <a:extLst>
+            <a:ext uri="{FF2B5EF4-FFF2-40B4-BE49-F238E27FC236}">
+              <a16:creationId xmlns:a16="http://schemas.microsoft.com/office/drawing/2014/main" id="{CED39F65-484C-C12C-A430-BCE3A89498CC}"/>
+            </a:ext>
+          </a:extLst>
+        </p:cNvPr>
+        <p:cNvGrpSpPr/>
+        <p:nvPr/>
+      </p:nvGrpSpPr>
+      <p:grpSpPr>
+        <a:xfrm>
+          <a:off x="0" y="0"/>
+          <a:ext cx="0" cy="0"/>
+          <a:chOff x="0" y="0"/>
+          <a:chExt cx="0" cy="0"/>
+        </a:xfrm>
+      </p:grpSpPr>
+      <p:sp>
+        <p:nvSpPr>
+          <p:cNvPr id="2" name="Shape 0">
+            <a:extLst>
+              <a:ext uri="{FF2B5EF4-FFF2-40B4-BE49-F238E27FC236}">
+                <a16:creationId xmlns:a16="http://schemas.microsoft.com/office/drawing/2014/main" id="{B812590F-16B2-48A9-0F3E-6134FEE2DAD0}"/>
+              </a:ext>
+            </a:extLst>
+          </p:cNvPr>
+          <p:cNvSpPr/>
+          <p:nvPr/>
+        </p:nvSpPr>
+        <p:spPr>
+          <a:xfrm>
+            <a:off x="-1828800" y="-2286000"/>
+            <a:ext cx="5486400" cy="5486400"/>
+          </a:xfrm>
+          <a:prstGeom prst="ellipse">
+            <a:avLst/>
+          </a:prstGeom>
+          <a:solidFill>
+            <a:srgbClr val="0E7C7B">
+              <a:alpha val="18000"/>
+            </a:srgbClr>
+          </a:solidFill>
+          <a:ln/>
+        </p:spPr>
+        <p:txBody>
+          <a:bodyPr/>
+          <a:lstStyle/>
+          <a:p>
+            <a:endParaRPr lang="en-US"/>
+          </a:p>
+        </p:txBody>
+      </p:sp>
+      <p:sp>
+        <p:nvSpPr>
+          <p:cNvPr id="3" name="Text 1">
+            <a:extLst>
+              <a:ext uri="{FF2B5EF4-FFF2-40B4-BE49-F238E27FC236}">
+                <a16:creationId xmlns:a16="http://schemas.microsoft.com/office/drawing/2014/main" id="{D20244B9-8480-FC8B-2713-D10C35668C2C}"/>
+              </a:ext>
+            </a:extLst>
+          </p:cNvPr>
+          <p:cNvSpPr/>
+          <p:nvPr/>
+        </p:nvSpPr>
+        <p:spPr>
+          <a:xfrm>
+            <a:off x="777240" y="1463040"/>
+            <a:ext cx="10515600" cy="731520"/>
+          </a:xfrm>
+          <a:prstGeom prst="rect">
+            <a:avLst/>
+          </a:prstGeom>
+          <a:noFill/>
+          <a:ln/>
+        </p:spPr>
+        <p:txBody>
+          <a:bodyPr wrap="square" lIns="0" tIns="0" rIns="0" bIns="0" rtlCol="0" anchor="ctr"/>
+          <a:lstStyle/>
+          <a:p>
+            <a:pPr marL="0" indent="0">
+              <a:buNone/>
+            </a:pPr>
+            <a:r>
+              <a:rPr lang="en-US" sz="3000" b="1" dirty="0">
+                <a:solidFill>
+                  <a:srgbClr val="FFFFFF"/>
+                </a:solidFill>
+                <a:latin typeface="Cambria" pitchFamily="34" charset="0"/>
+                <a:ea typeface="Cambria" pitchFamily="34" charset="-122"/>
+                <a:cs typeface="Cambria" pitchFamily="34" charset="-120"/>
+              </a:rPr>
+              <a:t>Núcleo estable + extensiones conectables</a:t>
+            </a:r>
+            <a:endParaRPr lang="en-US" sz="3000" dirty="0"/>
+          </a:p>
+        </p:txBody>
+      </p:sp>
+      <p:sp>
+        <p:nvSpPr>
+          <p:cNvPr id="4" name="Text 2">
+            <a:extLst>
+              <a:ext uri="{FF2B5EF4-FFF2-40B4-BE49-F238E27FC236}">
+                <a16:creationId xmlns:a16="http://schemas.microsoft.com/office/drawing/2014/main" id="{436CAE14-3E21-04F1-0553-F90B9D86C934}"/>
+              </a:ext>
+            </a:extLst>
+          </p:cNvPr>
+          <p:cNvSpPr/>
+          <p:nvPr/>
+        </p:nvSpPr>
+        <p:spPr>
+          <a:xfrm>
+            <a:off x="777240" y="2331720"/>
+            <a:ext cx="9875520" cy="914400"/>
+          </a:xfrm>
+          <a:prstGeom prst="rect">
+            <a:avLst/>
+          </a:prstGeom>
+          <a:noFill/>
+          <a:ln/>
+        </p:spPr>
+        <p:txBody>
+          <a:bodyPr wrap="square" lIns="0" tIns="0" rIns="0" bIns="0" rtlCol="0" anchor="ctr"/>
+          <a:lstStyle/>
+          <a:p>
+            <a:pPr marL="0" indent="0">
+              <a:lnSpc>
+                <a:spcPct val="125000"/>
+              </a:lnSpc>
+              <a:buNone/>
+            </a:pPr>
+            <a:r>
+              <a:rPr lang="en-US" sz="1500" dirty="0">
+                <a:solidFill>
+                  <a:srgbClr val="DCE7E9"/>
+                </a:solidFill>
+                <a:latin typeface="Calibri" pitchFamily="34" charset="0"/>
+                <a:ea typeface="Calibri" pitchFamily="34" charset="-122"/>
+                <a:cs typeface="Calibri" pitchFamily="34" charset="-120"/>
+              </a:rPr>
+              <a:t>El PluginManager es genérico y estable; los plugins son independientes y se comunican vía IAppContext; el Controller solo traduce HTTP a llamadas del núcleo. Así se demuestra en código real lo que dice la teoría.</a:t>
+            </a:r>
+            <a:endParaRPr lang="en-US" sz="1500" dirty="0"/>
+          </a:p>
+        </p:txBody>
+      </p:sp>
+      <p:sp>
+        <p:nvSpPr>
+          <p:cNvPr id="5" name="Shape 3">
+            <a:extLst>
+              <a:ext uri="{FF2B5EF4-FFF2-40B4-BE49-F238E27FC236}">
+                <a16:creationId xmlns:a16="http://schemas.microsoft.com/office/drawing/2014/main" id="{275F61F6-DC63-B1E6-3770-79A0C69494F9}"/>
+              </a:ext>
+            </a:extLst>
+          </p:cNvPr>
+          <p:cNvSpPr/>
+          <p:nvPr/>
+        </p:nvSpPr>
+        <p:spPr>
+          <a:xfrm>
+            <a:off x="777240" y="3749040"/>
+            <a:ext cx="3383280" cy="1371600"/>
+          </a:xfrm>
+          <a:prstGeom prst="roundRect">
+            <a:avLst>
+              <a:gd name="adj" fmla="val 5333"/>
+            </a:avLst>
+          </a:prstGeom>
+          <a:solidFill>
+            <a:srgbClr val="10293A"/>
+          </a:solidFill>
+          <a:ln/>
+          <a:effectLst>
+            <a:outerShdw blurRad="101600" dist="25400" dir="5400000" algn="bl" rotWithShape="0">
+              <a:srgbClr val="000000">
+                <a:alpha val="12000"/>
+              </a:srgbClr>
+            </a:outerShdw>
+          </a:effectLst>
+        </p:spPr>
+        <p:txBody>
+          <a:bodyPr/>
+          <a:lstStyle/>
+          <a:p>
+            <a:endParaRPr lang="en-US"/>
+          </a:p>
+        </p:txBody>
+      </p:sp>
+      <p:pic>
+        <p:nvPicPr>
+          <p:cNvPr id="6" name="Image 0" descr="icon_server.png">
+            <a:extLst>
+              <a:ext uri="{FF2B5EF4-FFF2-40B4-BE49-F238E27FC236}">
+                <a16:creationId xmlns:a16="http://schemas.microsoft.com/office/drawing/2014/main" id="{9C74CF6D-C84B-1F77-9A45-E67CAFD53252}"/>
+              </a:ext>
+            </a:extLst>
+          </p:cNvPr>
+          <p:cNvPicPr>
+            <a:picLocks noChangeAspect="1"/>
+          </p:cNvPicPr>
+          <p:nvPr/>
+        </p:nvPicPr>
+        <p:blipFill>
+          <a:blip r:embed="rId3"/>
+          <a:stretch>
+            <a:fillRect/>
+          </a:stretch>
+        </p:blipFill>
+        <p:spPr>
+          <a:xfrm>
+            <a:off x="1051560" y="4023360"/>
+            <a:ext cx="457200" cy="457200"/>
+          </a:xfrm>
+          <a:prstGeom prst="rect">
+            <a:avLst/>
+          </a:prstGeom>
+        </p:spPr>
+      </p:pic>
+      <p:sp>
+        <p:nvSpPr>
+          <p:cNvPr id="7" name="Text 4">
+            <a:extLst>
+              <a:ext uri="{FF2B5EF4-FFF2-40B4-BE49-F238E27FC236}">
+                <a16:creationId xmlns:a16="http://schemas.microsoft.com/office/drawing/2014/main" id="{1C07F9D0-D44C-1408-49AE-0986C5209F20}"/>
+              </a:ext>
+            </a:extLst>
+          </p:cNvPr>
+          <p:cNvSpPr/>
+          <p:nvPr/>
+        </p:nvSpPr>
+        <p:spPr>
+          <a:xfrm>
+            <a:off x="1645920" y="3977640"/>
+            <a:ext cx="2286000" cy="365760"/>
+          </a:xfrm>
+          <a:prstGeom prst="rect">
+            <a:avLst/>
+          </a:prstGeom>
+          <a:noFill/>
+          <a:ln/>
+        </p:spPr>
+        <p:txBody>
+          <a:bodyPr wrap="square" lIns="0" tIns="0" rIns="0" bIns="0" rtlCol="0" anchor="ctr"/>
+          <a:lstStyle/>
+          <a:p>
+            <a:pPr marL="0" indent="0">
+              <a:buNone/>
+            </a:pPr>
+            <a:r>
+              <a:rPr lang="en-US" sz="1450" b="1" dirty="0">
+                <a:solidFill>
+                  <a:srgbClr val="FFFFFF"/>
+                </a:solidFill>
+                <a:latin typeface="Calibri" pitchFamily="34" charset="0"/>
+                <a:ea typeface="Calibri" pitchFamily="34" charset="-122"/>
+                <a:cs typeface="Calibri" pitchFamily="34" charset="-120"/>
+              </a:rPr>
+              <a:t>Core</a:t>
+            </a:r>
+            <a:endParaRPr lang="en-US" sz="1450" dirty="0"/>
+          </a:p>
+        </p:txBody>
+      </p:sp>
+      <p:sp>
+        <p:nvSpPr>
+          <p:cNvPr id="8" name="Text 5">
+            <a:extLst>
+              <a:ext uri="{FF2B5EF4-FFF2-40B4-BE49-F238E27FC236}">
+                <a16:creationId xmlns:a16="http://schemas.microsoft.com/office/drawing/2014/main" id="{25DF0F2B-852C-815E-7858-65366B4A145D}"/>
+              </a:ext>
+            </a:extLst>
+          </p:cNvPr>
+          <p:cNvSpPr/>
+          <p:nvPr/>
+        </p:nvSpPr>
+        <p:spPr>
+          <a:xfrm>
+            <a:off x="1645920" y="4315968"/>
+            <a:ext cx="2286000" cy="365760"/>
+          </a:xfrm>
+          <a:prstGeom prst="rect">
+            <a:avLst/>
+          </a:prstGeom>
+          <a:noFill/>
+          <a:ln/>
+        </p:spPr>
+        <p:txBody>
+          <a:bodyPr wrap="square" lIns="0" tIns="0" rIns="0" bIns="0" rtlCol="0" anchor="ctr"/>
+          <a:lstStyle/>
+          <a:p>
+            <a:pPr marL="0" indent="0">
+              <a:buNone/>
+            </a:pPr>
+            <a:r>
+              <a:rPr lang="en-US" sz="1150" dirty="0">
+                <a:solidFill>
+                  <a:srgbClr val="BFEFE0"/>
+                </a:solidFill>
+                <a:latin typeface="Calibri" pitchFamily="34" charset="0"/>
+                <a:ea typeface="Calibri" pitchFamily="34" charset="-122"/>
+                <a:cs typeface="Calibri" pitchFamily="34" charset="-120"/>
+              </a:rPr>
+              <a:t>Genérico, estable</a:t>
+            </a:r>
+            <a:endParaRPr lang="en-US" sz="1150" dirty="0"/>
+          </a:p>
+        </p:txBody>
+      </p:sp>
+      <p:sp>
+        <p:nvSpPr>
+          <p:cNvPr id="9" name="Shape 6">
+            <a:extLst>
+              <a:ext uri="{FF2B5EF4-FFF2-40B4-BE49-F238E27FC236}">
+                <a16:creationId xmlns:a16="http://schemas.microsoft.com/office/drawing/2014/main" id="{AE434A1D-14AE-E9B7-F83F-3C2368D2D32C}"/>
+              </a:ext>
+            </a:extLst>
+          </p:cNvPr>
+          <p:cNvSpPr/>
+          <p:nvPr/>
+        </p:nvSpPr>
+        <p:spPr>
+          <a:xfrm>
+            <a:off x="4343400" y="3749040"/>
+            <a:ext cx="3383280" cy="1371600"/>
+          </a:xfrm>
+          <a:prstGeom prst="roundRect">
+            <a:avLst>
+              <a:gd name="adj" fmla="val 5333"/>
+            </a:avLst>
+          </a:prstGeom>
+          <a:solidFill>
+            <a:srgbClr val="10293A"/>
+          </a:solidFill>
+          <a:ln/>
+          <a:effectLst>
+            <a:outerShdw blurRad="101600" dist="25400" dir="5400000" algn="bl" rotWithShape="0">
+              <a:srgbClr val="000000">
+                <a:alpha val="12000"/>
+              </a:srgbClr>
+            </a:outerShdw>
+          </a:effectLst>
+        </p:spPr>
+        <p:txBody>
+          <a:bodyPr/>
+          <a:lstStyle/>
+          <a:p>
+            <a:endParaRPr lang="en-US"/>
+          </a:p>
+        </p:txBody>
+      </p:sp>
+      <p:pic>
+        <p:nvPicPr>
+          <p:cNvPr id="10" name="Image 1" descr="icon_puzzle.png">
+            <a:extLst>
+              <a:ext uri="{FF2B5EF4-FFF2-40B4-BE49-F238E27FC236}">
+                <a16:creationId xmlns:a16="http://schemas.microsoft.com/office/drawing/2014/main" id="{A143F8E0-B626-7184-93AF-805450C14EE5}"/>
+              </a:ext>
+            </a:extLst>
+          </p:cNvPr>
+          <p:cNvPicPr>
+            <a:picLocks noChangeAspect="1"/>
+          </p:cNvPicPr>
+          <p:nvPr/>
+        </p:nvPicPr>
+        <p:blipFill>
+          <a:blip r:embed="rId4"/>
+          <a:stretch>
+            <a:fillRect/>
+          </a:stretch>
+        </p:blipFill>
+        <p:spPr>
+          <a:xfrm>
+            <a:off x="4617720" y="4023360"/>
+            <a:ext cx="457200" cy="457200"/>
+          </a:xfrm>
+          <a:prstGeom prst="rect">
+            <a:avLst/>
+          </a:prstGeom>
+        </p:spPr>
+      </p:pic>
+      <p:sp>
+        <p:nvSpPr>
+          <p:cNvPr id="11" name="Text 7">
+            <a:extLst>
+              <a:ext uri="{FF2B5EF4-FFF2-40B4-BE49-F238E27FC236}">
+                <a16:creationId xmlns:a16="http://schemas.microsoft.com/office/drawing/2014/main" id="{35DEE7C2-8242-1B07-172C-B9E2F1F5AAAD}"/>
+              </a:ext>
+            </a:extLst>
+          </p:cNvPr>
+          <p:cNvSpPr/>
+          <p:nvPr/>
+        </p:nvSpPr>
+        <p:spPr>
+          <a:xfrm>
+            <a:off x="5212080" y="3977640"/>
+            <a:ext cx="2286000" cy="365760"/>
+          </a:xfrm>
+          <a:prstGeom prst="rect">
+            <a:avLst/>
+          </a:prstGeom>
+          <a:noFill/>
+          <a:ln/>
+        </p:spPr>
+        <p:txBody>
+          <a:bodyPr wrap="square" lIns="0" tIns="0" rIns="0" bIns="0" rtlCol="0" anchor="ctr"/>
+          <a:lstStyle/>
+          <a:p>
+            <a:pPr marL="0" indent="0">
+              <a:buNone/>
+            </a:pPr>
+            <a:r>
+              <a:rPr lang="en-US" sz="1450" b="1" dirty="0">
+                <a:solidFill>
+                  <a:srgbClr val="FFFFFF"/>
+                </a:solidFill>
+                <a:latin typeface="Calibri" pitchFamily="34" charset="0"/>
+                <a:ea typeface="Calibri" pitchFamily="34" charset="-122"/>
+                <a:cs typeface="Calibri" pitchFamily="34" charset="-120"/>
+              </a:rPr>
+              <a:t>Plugins</a:t>
+            </a:r>
+            <a:endParaRPr lang="en-US" sz="1450" dirty="0"/>
+          </a:p>
+        </p:txBody>
+      </p:sp>
+      <p:sp>
+        <p:nvSpPr>
+          <p:cNvPr id="12" name="Text 8">
+            <a:extLst>
+              <a:ext uri="{FF2B5EF4-FFF2-40B4-BE49-F238E27FC236}">
+                <a16:creationId xmlns:a16="http://schemas.microsoft.com/office/drawing/2014/main" id="{D9FB5026-C4DD-1B18-80D6-78522256DEFF}"/>
+              </a:ext>
+            </a:extLst>
+          </p:cNvPr>
+          <p:cNvSpPr/>
+          <p:nvPr/>
+        </p:nvSpPr>
+        <p:spPr>
+          <a:xfrm>
+            <a:off x="5212080" y="4315968"/>
+            <a:ext cx="2286000" cy="365760"/>
+          </a:xfrm>
+          <a:prstGeom prst="rect">
+            <a:avLst/>
+          </a:prstGeom>
+          <a:noFill/>
+          <a:ln/>
+        </p:spPr>
+        <p:txBody>
+          <a:bodyPr wrap="square" lIns="0" tIns="0" rIns="0" bIns="0" rtlCol="0" anchor="ctr"/>
+          <a:lstStyle/>
+          <a:p>
+            <a:pPr marL="0" indent="0">
+              <a:buNone/>
+            </a:pPr>
+            <a:r>
+              <a:rPr lang="en-US" sz="1150" dirty="0">
+                <a:solidFill>
+                  <a:srgbClr val="BFEFE0"/>
+                </a:solidFill>
+                <a:latin typeface="Calibri" pitchFamily="34" charset="0"/>
+                <a:ea typeface="Calibri" pitchFamily="34" charset="-122"/>
+                <a:cs typeface="Calibri" pitchFamily="34" charset="-120"/>
+              </a:rPr>
+              <a:t>Independientes</a:t>
+            </a:r>
+            <a:endParaRPr lang="en-US" sz="1150" dirty="0"/>
+          </a:p>
+        </p:txBody>
+      </p:sp>
+      <p:sp>
+        <p:nvSpPr>
+          <p:cNvPr id="13" name="Shape 9">
+            <a:extLst>
+              <a:ext uri="{FF2B5EF4-FFF2-40B4-BE49-F238E27FC236}">
+                <a16:creationId xmlns:a16="http://schemas.microsoft.com/office/drawing/2014/main" id="{A8D8742B-534F-4286-B4EF-C8AE72705301}"/>
+              </a:ext>
+            </a:extLst>
+          </p:cNvPr>
+          <p:cNvSpPr/>
+          <p:nvPr/>
+        </p:nvSpPr>
+        <p:spPr>
+          <a:xfrm>
+            <a:off x="7909560" y="3749040"/>
+            <a:ext cx="3383280" cy="1371600"/>
+          </a:xfrm>
+          <a:prstGeom prst="roundRect">
+            <a:avLst>
+              <a:gd name="adj" fmla="val 5333"/>
+            </a:avLst>
+          </a:prstGeom>
+          <a:solidFill>
+            <a:srgbClr val="10293A"/>
+          </a:solidFill>
+          <a:ln/>
+          <a:effectLst>
+            <a:outerShdw blurRad="101600" dist="25400" dir="5400000" algn="bl" rotWithShape="0">
+              <a:srgbClr val="000000">
+                <a:alpha val="12000"/>
+              </a:srgbClr>
+            </a:outerShdw>
+          </a:effectLst>
+        </p:spPr>
+        <p:txBody>
+          <a:bodyPr/>
+          <a:lstStyle/>
+          <a:p>
+            <a:endParaRPr lang="en-US"/>
+          </a:p>
+        </p:txBody>
+      </p:sp>
+      <p:pic>
+        <p:nvPicPr>
+          <p:cNvPr id="14" name="Image 2" descr="icon_exchange_white.png">
+            <a:extLst>
+              <a:ext uri="{FF2B5EF4-FFF2-40B4-BE49-F238E27FC236}">
+                <a16:creationId xmlns:a16="http://schemas.microsoft.com/office/drawing/2014/main" id="{BBE21BD1-8A5F-6284-C97B-E77EFF3FEC26}"/>
+              </a:ext>
+            </a:extLst>
+          </p:cNvPr>
+          <p:cNvPicPr>
+            <a:picLocks noChangeAspect="1"/>
+          </p:cNvPicPr>
+          <p:nvPr/>
+        </p:nvPicPr>
+        <p:blipFill>
+          <a:blip r:embed="rId5"/>
+          <a:stretch>
+            <a:fillRect/>
+          </a:stretch>
+        </p:blipFill>
+        <p:spPr>
+          <a:xfrm>
+            <a:off x="8183880" y="4023360"/>
+            <a:ext cx="457200" cy="457200"/>
+          </a:xfrm>
+          <a:prstGeom prst="rect">
+            <a:avLst/>
+          </a:prstGeom>
+        </p:spPr>
+      </p:pic>
+      <p:sp>
+        <p:nvSpPr>
+          <p:cNvPr id="15" name="Text 10">
+            <a:extLst>
+              <a:ext uri="{FF2B5EF4-FFF2-40B4-BE49-F238E27FC236}">
+                <a16:creationId xmlns:a16="http://schemas.microsoft.com/office/drawing/2014/main" id="{66621D9D-93CF-2F19-E1D3-FD3BC9E320CC}"/>
+              </a:ext>
+            </a:extLst>
+          </p:cNvPr>
+          <p:cNvSpPr/>
+          <p:nvPr/>
+        </p:nvSpPr>
+        <p:spPr>
+          <a:xfrm>
+            <a:off x="8778240" y="3977640"/>
+            <a:ext cx="2286000" cy="365760"/>
+          </a:xfrm>
+          <a:prstGeom prst="rect">
+            <a:avLst/>
+          </a:prstGeom>
+          <a:noFill/>
+          <a:ln/>
+        </p:spPr>
+        <p:txBody>
+          <a:bodyPr wrap="square" lIns="0" tIns="0" rIns="0" bIns="0" rtlCol="0" anchor="ctr"/>
+          <a:lstStyle/>
+          <a:p>
+            <a:pPr marL="0" indent="0">
+              <a:buNone/>
+            </a:pPr>
+            <a:r>
+              <a:rPr lang="en-US" sz="1450" b="1" dirty="0">
+                <a:solidFill>
+                  <a:srgbClr val="FFFFFF"/>
+                </a:solidFill>
+                <a:latin typeface="Calibri" pitchFamily="34" charset="0"/>
+                <a:ea typeface="Calibri" pitchFamily="34" charset="-122"/>
+                <a:cs typeface="Calibri" pitchFamily="34" charset="-120"/>
+              </a:rPr>
+              <a:t>Controller</a:t>
+            </a:r>
+            <a:endParaRPr lang="en-US" sz="1450" dirty="0"/>
+          </a:p>
+        </p:txBody>
+      </p:sp>
+      <p:sp>
+        <p:nvSpPr>
+          <p:cNvPr id="16" name="Text 11">
+            <a:extLst>
+              <a:ext uri="{FF2B5EF4-FFF2-40B4-BE49-F238E27FC236}">
+                <a16:creationId xmlns:a16="http://schemas.microsoft.com/office/drawing/2014/main" id="{1F83B670-E7B4-2431-F04B-8437549B126F}"/>
+              </a:ext>
+            </a:extLst>
+          </p:cNvPr>
+          <p:cNvSpPr/>
+          <p:nvPr/>
+        </p:nvSpPr>
+        <p:spPr>
+          <a:xfrm>
+            <a:off x="8778240" y="4315968"/>
+            <a:ext cx="2286000" cy="365760"/>
+          </a:xfrm>
+          <a:prstGeom prst="rect">
+            <a:avLst/>
+          </a:prstGeom>
+          <a:noFill/>
+          <a:ln/>
+        </p:spPr>
+        <p:txBody>
+          <a:bodyPr wrap="square" lIns="0" tIns="0" rIns="0" bIns="0" rtlCol="0" anchor="ctr"/>
+          <a:lstStyle/>
+          <a:p>
+            <a:pPr marL="0" indent="0">
+              <a:buNone/>
+            </a:pPr>
+            <a:r>
+              <a:rPr lang="en-US" sz="1150" dirty="0">
+                <a:solidFill>
+                  <a:srgbClr val="BFEFE0"/>
+                </a:solidFill>
+                <a:latin typeface="Calibri" pitchFamily="34" charset="0"/>
+                <a:ea typeface="Calibri" pitchFamily="34" charset="-122"/>
+                <a:cs typeface="Calibri" pitchFamily="34" charset="-120"/>
+              </a:rPr>
+              <a:t>Solo traduce HTTP</a:t>
+            </a:r>
+            <a:endParaRPr lang="en-US" sz="1150" dirty="0"/>
+          </a:p>
+        </p:txBody>
+      </p:sp>
+      <p:sp>
+        <p:nvSpPr>
+          <p:cNvPr id="17" name="Text 12">
+            <a:extLst>
+              <a:ext uri="{FF2B5EF4-FFF2-40B4-BE49-F238E27FC236}">
+                <a16:creationId xmlns:a16="http://schemas.microsoft.com/office/drawing/2014/main" id="{9F0A90A2-7A41-983A-FEE5-A0CF4FD284A9}"/>
+              </a:ext>
+            </a:extLst>
+          </p:cNvPr>
+          <p:cNvSpPr/>
+          <p:nvPr/>
+        </p:nvSpPr>
+        <p:spPr>
+          <a:xfrm>
+            <a:off x="777240" y="5623560"/>
+            <a:ext cx="5486400" cy="548640"/>
+          </a:xfrm>
+          <a:prstGeom prst="rect">
+            <a:avLst/>
+          </a:prstGeom>
+          <a:noFill/>
+          <a:ln/>
+        </p:spPr>
+        <p:txBody>
+          <a:bodyPr wrap="square" lIns="0" tIns="0" rIns="0" bIns="0" rtlCol="0" anchor="ctr"/>
+          <a:lstStyle/>
+          <a:p>
+            <a:pPr marL="0" indent="0">
+              <a:buNone/>
+            </a:pPr>
+            <a:r>
+              <a:rPr lang="en-US" sz="2400" b="1" dirty="0">
+                <a:solidFill>
+                  <a:srgbClr val="02C39A"/>
+                </a:solidFill>
+                <a:latin typeface="Cambria" pitchFamily="34" charset="0"/>
+                <a:ea typeface="Cambria" pitchFamily="34" charset="-122"/>
+                <a:cs typeface="Cambria" pitchFamily="34" charset="-120"/>
+              </a:rPr>
+              <a:t>Gracias</a:t>
+            </a:r>
+            <a:endParaRPr lang="en-US" sz="2400" dirty="0"/>
+          </a:p>
+        </p:txBody>
+      </p:sp>
+    </p:spTree>
+    <p:extLst>
+      <p:ext uri="{BB962C8B-B14F-4D97-AF65-F5344CB8AC3E}">
+        <p14:creationId xmlns:p14="http://schemas.microsoft.com/office/powerpoint/2010/main" val="4235163734"/>
+      </p:ext>
+    </p:extLst>
   </p:cSld>
   <p:clrMapOvr>
     <a:masterClrMapping/>
@@ -6384,15 +7314,7 @@
 
 <file path=ppt/slides/slide9.xml><?xml version="1.0" encoding="utf-8"?>
 <p:sld xmlns:a="http://schemas.openxmlformats.org/drawingml/2006/main" xmlns:r="http://schemas.openxmlformats.org/officeDocument/2006/relationships" xmlns:p="http://schemas.openxmlformats.org/presentationml/2006/main">
-  <p:cSld name="Slide 11">
-    <p:bg>
-      <p:bgPr>
-        <a:solidFill>
-          <a:srgbClr val="0B1F2A"/>
-        </a:solidFill>
-        <a:effectLst/>
-      </p:bgPr>
-    </p:bg>
+  <p:cSld>
     <p:spTree>
       <p:nvGrpSpPr>
         <p:cNvPr id="1" name=""/>
@@ -6409,30 +7331,40 @@
       </p:grpSpPr>
       <p:sp>
         <p:nvSpPr>
-          <p:cNvPr id="2" name="Shape 0"/>
-          <p:cNvSpPr/>
-          <p:nvPr/>
-        </p:nvSpPr>
-        <p:spPr>
-          <a:xfrm>
-            <a:off x="-1828800" y="-2286000"/>
-            <a:ext cx="5486400" cy="5486400"/>
-          </a:xfrm>
-          <a:prstGeom prst="ellipse">
-            <a:avLst/>
-          </a:prstGeom>
-          <a:solidFill>
-            <a:srgbClr val="0E7C7B">
-              <a:alpha val="18000"/>
-            </a:srgbClr>
-          </a:solidFill>
-          <a:ln/>
-        </p:spPr>
-        <p:txBody>
-          <a:bodyPr/>
-          <a:lstStyle/>
-          <a:p>
-            <a:endParaRPr lang="en-US"/>
+          <p:cNvPr id="2" name="Text 0"/>
+          <p:cNvSpPr/>
+          <p:nvPr/>
+        </p:nvSpPr>
+        <p:spPr>
+          <a:xfrm>
+            <a:off x="502920" y="320040"/>
+            <a:ext cx="7315200" cy="274320"/>
+          </a:xfrm>
+          <a:prstGeom prst="rect">
+            <a:avLst/>
+          </a:prstGeom>
+          <a:noFill/>
+          <a:ln/>
+        </p:spPr>
+        <p:txBody>
+          <a:bodyPr wrap="square" lIns="0" tIns="0" rIns="0" bIns="0" rtlCol="0" anchor="ctr"/>
+          <a:lstStyle/>
+          <a:p>
+            <a:pPr marL="0" indent="0" algn="l">
+              <a:buNone/>
+            </a:pPr>
+            <a:r>
+              <a:rPr lang="en-US" sz="1200" b="1" kern="0" spc="200" dirty="0">
+                <a:solidFill>
+                  <a:srgbClr val="0E7C7B"/>
+                </a:solidFill>
+                <a:latin typeface="Calibri" pitchFamily="34" charset="0"/>
+                <a:ea typeface="Calibri" pitchFamily="34" charset="-122"/>
+                <a:cs typeface="Calibri" pitchFamily="34" charset="-120"/>
+              </a:rPr>
+              <a:t>FUENTES CONSULTADAS</a:t>
+            </a:r>
+            <a:endParaRPr lang="en-US" sz="1200" dirty="0"/>
           </a:p>
         </p:txBody>
       </p:sp>
@@ -6444,8 +7376,8 @@
         </p:nvSpPr>
         <p:spPr>
           <a:xfrm>
-            <a:off x="777240" y="1463040"/>
-            <a:ext cx="10515600" cy="731520"/>
+            <a:off x="502920" y="566928"/>
+            <a:ext cx="10607040" cy="594360"/>
           </a:xfrm>
           <a:prstGeom prst="rect">
             <a:avLst/>
@@ -6457,21 +7389,21 @@
           <a:bodyPr wrap="square" lIns="0" tIns="0" rIns="0" bIns="0" rtlCol="0" anchor="ctr"/>
           <a:lstStyle/>
           <a:p>
-            <a:pPr marL="0" indent="0">
-              <a:buNone/>
-            </a:pPr>
-            <a:r>
-              <a:rPr lang="en-US" sz="3000" b="1" dirty="0">
-                <a:solidFill>
-                  <a:srgbClr val="FFFFFF"/>
+            <a:pPr marL="0" indent="0" algn="l">
+              <a:buNone/>
+            </a:pPr>
+            <a:r>
+              <a:rPr lang="en-US" sz="2800" b="1" dirty="0">
+                <a:solidFill>
+                  <a:srgbClr val="16252B"/>
                 </a:solidFill>
                 <a:latin typeface="Cambria" pitchFamily="34" charset="0"/>
                 <a:ea typeface="Cambria" pitchFamily="34" charset="-122"/>
                 <a:cs typeface="Cambria" pitchFamily="34" charset="-120"/>
               </a:rPr>
-              <a:t>Núcleo estable + extensiones conectables</a:t>
-            </a:r>
-            <a:endParaRPr lang="en-US" sz="3000" dirty="0"/>
+              <a:t>Referencias bibliográficas</a:t>
+            </a:r>
+            <a:endParaRPr lang="en-US" sz="2800" dirty="0"/>
           </a:p>
         </p:txBody>
       </p:sp>
@@ -6483,8 +7415,8 @@
         </p:nvSpPr>
         <p:spPr>
           <a:xfrm>
-            <a:off x="777240" y="2331720"/>
-            <a:ext cx="9875520" cy="914400"/>
+            <a:off x="10424160" y="6510528"/>
+            <a:ext cx="1645920" cy="228600"/>
           </a:xfrm>
           <a:prstGeom prst="rect">
             <a:avLst/>
@@ -6496,45 +7428,81 @@
           <a:bodyPr wrap="square" lIns="0" tIns="0" rIns="0" bIns="0" rtlCol="0" anchor="ctr"/>
           <a:lstStyle/>
           <a:p>
+            <a:pPr marL="0" indent="0" algn="r">
+              <a:buNone/>
+            </a:pPr>
+            <a:r>
+              <a:rPr lang="en-US" sz="900" dirty="0">
+                <a:solidFill>
+                  <a:srgbClr val="5B6B73"/>
+                </a:solidFill>
+                <a:latin typeface="Calibri" pitchFamily="34" charset="0"/>
+                <a:ea typeface="Calibri" pitchFamily="34" charset="-122"/>
+                <a:cs typeface="Calibri" pitchFamily="34" charset="-120"/>
+              </a:rPr>
+              <a:t>Mundial Plugin · Microkernel</a:t>
+            </a:r>
+            <a:endParaRPr lang="en-US" sz="900" dirty="0"/>
+          </a:p>
+        </p:txBody>
+      </p:sp>
+      <p:sp>
+        <p:nvSpPr>
+          <p:cNvPr id="5" name="Text 3"/>
+          <p:cNvSpPr/>
+          <p:nvPr/>
+        </p:nvSpPr>
+        <p:spPr>
+          <a:xfrm>
+            <a:off x="502920" y="1371600"/>
+            <a:ext cx="10607040" cy="457200"/>
+          </a:xfrm>
+          <a:prstGeom prst="rect">
+            <a:avLst/>
+          </a:prstGeom>
+          <a:noFill/>
+          <a:ln/>
+        </p:spPr>
+        <p:txBody>
+          <a:bodyPr wrap="square" lIns="0" tIns="0" rIns="0" bIns="0" rtlCol="0" anchor="ctr"/>
+          <a:lstStyle/>
+          <a:p>
             <a:pPr marL="0" indent="0">
-              <a:lnSpc>
-                <a:spcPct val="125000"/>
-              </a:lnSpc>
-              <a:buNone/>
-            </a:pPr>
-            <a:r>
-              <a:rPr lang="en-US" sz="1500" dirty="0">
-                <a:solidFill>
-                  <a:srgbClr val="DCE7E9"/>
-                </a:solidFill>
-                <a:latin typeface="Calibri" pitchFamily="34" charset="0"/>
-                <a:ea typeface="Calibri" pitchFamily="34" charset="-122"/>
-                <a:cs typeface="Calibri" pitchFamily="34" charset="-120"/>
-              </a:rPr>
-              <a:t>El PluginManager es genérico y estable; los plugins son independientes y se comunican vía IAppContext; el Controller solo traduce HTTP a llamadas del núcleo. Así se demuestra en código real lo que dice la teoría.</a:t>
-            </a:r>
-            <a:endParaRPr lang="en-US" sz="1500" dirty="0"/>
-          </a:p>
-        </p:txBody>
-      </p:sp>
-      <p:sp>
-        <p:nvSpPr>
-          <p:cNvPr id="5" name="Shape 3"/>
-          <p:cNvSpPr/>
-          <p:nvPr/>
-        </p:nvSpPr>
-        <p:spPr>
-          <a:xfrm>
-            <a:off x="777240" y="3749040"/>
-            <a:ext cx="3383280" cy="1371600"/>
+              <a:buNone/>
+            </a:pPr>
+            <a:r>
+              <a:rPr lang="en-US" sz="1350" dirty="0">
+                <a:solidFill>
+                  <a:srgbClr val="5B6B73"/>
+                </a:solidFill>
+                <a:latin typeface="Calibri" pitchFamily="34" charset="0"/>
+                <a:ea typeface="Calibri" pitchFamily="34" charset="-122"/>
+                <a:cs typeface="Calibri" pitchFamily="34" charset="-120"/>
+              </a:rPr>
+              <a:t>Fuentes académicas y técnicas que sustentan el patrón Microkernel y su implementación en C# / ASP.NET Core.</a:t>
+            </a:r>
+            <a:endParaRPr lang="en-US" sz="1350" dirty="0"/>
+          </a:p>
+        </p:txBody>
+      </p:sp>
+      <p:sp>
+        <p:nvSpPr>
+          <p:cNvPr id="6" name="Shape 4"/>
+          <p:cNvSpPr/>
+          <p:nvPr/>
+        </p:nvSpPr>
+        <p:spPr>
+          <a:xfrm>
+            <a:off x="502920" y="2011680"/>
+            <a:ext cx="11155680" cy="1691640"/>
           </a:xfrm>
           <a:prstGeom prst="roundRect">
             <a:avLst>
-              <a:gd name="adj" fmla="val 5333"/>
+              <a:gd name="adj" fmla="val 4324"/>
             </a:avLst>
           </a:prstGeom>
           <a:solidFill>
-            <a:srgbClr val="10293A"/>
+            <a:srgbClr val="FFFFFF"/>
           </a:solidFill>
           <a:ln/>
           <a:effectLst>
@@ -6553,9 +7521,36 @@
           </a:p>
         </p:txBody>
       </p:sp>
+      <p:sp>
+        <p:nvSpPr>
+          <p:cNvPr id="7" name="Shape 5"/>
+          <p:cNvSpPr/>
+          <p:nvPr/>
+        </p:nvSpPr>
+        <p:spPr>
+          <a:xfrm>
+            <a:off x="502920" y="2011680"/>
+            <a:ext cx="73152" cy="1691640"/>
+          </a:xfrm>
+          <a:prstGeom prst="roundRect">
+            <a:avLst/>
+          </a:prstGeom>
+          <a:solidFill>
+            <a:srgbClr val="02C39A"/>
+          </a:solidFill>
+          <a:ln/>
+        </p:spPr>
+        <p:txBody>
+          <a:bodyPr/>
+          <a:lstStyle/>
+          <a:p>
+            <a:endParaRPr lang="en-US"/>
+          </a:p>
+        </p:txBody>
+      </p:sp>
       <p:pic>
         <p:nvPicPr>
-          <p:cNvPr id="6" name="Image 0" descr="icon_server.png"/>
+          <p:cNvPr id="8" name="Image 0" descr="icon_book.png"/>
           <p:cNvPicPr>
             <a:picLocks noChangeAspect="1"/>
           </p:cNvPicPr>
@@ -6569,8 +7564,8 @@
         </p:blipFill>
         <p:spPr>
           <a:xfrm>
-            <a:off x="1051560" y="4023360"/>
-            <a:ext cx="457200" cy="457200"/>
+            <a:off x="868680" y="2249424"/>
+            <a:ext cx="420624" cy="420624"/>
           </a:xfrm>
           <a:prstGeom prst="rect">
             <a:avLst/>
@@ -6579,100 +7574,175 @@
       </p:pic>
       <p:sp>
         <p:nvSpPr>
-          <p:cNvPr id="7" name="Text 4"/>
-          <p:cNvSpPr/>
-          <p:nvPr/>
-        </p:nvSpPr>
-        <p:spPr>
-          <a:xfrm>
-            <a:off x="1645920" y="3977640"/>
-            <a:ext cx="2286000" cy="365760"/>
-          </a:xfrm>
-          <a:prstGeom prst="rect">
-            <a:avLst/>
-          </a:prstGeom>
-          <a:noFill/>
-          <a:ln/>
-        </p:spPr>
-        <p:txBody>
-          <a:bodyPr wrap="square" lIns="0" tIns="0" rIns="0" bIns="0" rtlCol="0" anchor="ctr"/>
+          <p:cNvPr id="9" name="Text 6"/>
+          <p:cNvSpPr/>
+          <p:nvPr/>
+        </p:nvSpPr>
+        <p:spPr>
+          <a:xfrm>
+            <a:off x="1508760" y="2148840"/>
+            <a:ext cx="9875520" cy="594360"/>
+          </a:xfrm>
+          <a:prstGeom prst="rect">
+            <a:avLst/>
+          </a:prstGeom>
+          <a:noFill/>
+          <a:ln/>
+        </p:spPr>
+        <p:txBody>
+          <a:bodyPr wrap="square" lIns="0" tIns="0" rIns="0" bIns="0" rtlCol="0" anchor="t"/>
           <a:lstStyle/>
           <a:p>
             <a:pPr marL="0" indent="0">
-              <a:buNone/>
-            </a:pPr>
-            <a:r>
-              <a:rPr lang="en-US" sz="1450" b="1" dirty="0">
-                <a:solidFill>
-                  <a:srgbClr val="FFFFFF"/>
-                </a:solidFill>
-                <a:latin typeface="Calibri" pitchFamily="34" charset="0"/>
-                <a:ea typeface="Calibri" pitchFamily="34" charset="-122"/>
-                <a:cs typeface="Calibri" pitchFamily="34" charset="-120"/>
-              </a:rPr>
-              <a:t>Core</a:t>
-            </a:r>
-            <a:endParaRPr lang="en-US" sz="1450" dirty="0"/>
-          </a:p>
-        </p:txBody>
-      </p:sp>
-      <p:sp>
-        <p:nvSpPr>
-          <p:cNvPr id="8" name="Text 5"/>
-          <p:cNvSpPr/>
-          <p:nvPr/>
-        </p:nvSpPr>
-        <p:spPr>
-          <a:xfrm>
-            <a:off x="1645920" y="4315968"/>
-            <a:ext cx="2286000" cy="365760"/>
-          </a:xfrm>
-          <a:prstGeom prst="rect">
-            <a:avLst/>
-          </a:prstGeom>
-          <a:noFill/>
-          <a:ln/>
-        </p:spPr>
-        <p:txBody>
-          <a:bodyPr wrap="square" lIns="0" tIns="0" rIns="0" bIns="0" rtlCol="0" anchor="ctr"/>
+              <a:lnSpc>
+                <a:spcPct val="115000"/>
+              </a:lnSpc>
+              <a:buNone/>
+            </a:pPr>
+            <a:r>
+              <a:rPr lang="en-US" sz="1350" b="1" dirty="0">
+                <a:solidFill>
+                  <a:srgbClr val="16252B"/>
+                </a:solidFill>
+                <a:latin typeface="Calibri" pitchFamily="34" charset="0"/>
+                <a:ea typeface="Calibri" pitchFamily="34" charset="-122"/>
+                <a:cs typeface="Calibri" pitchFamily="34" charset="-120"/>
+              </a:rPr>
+              <a:t>Richards, M., &amp; Ford, N. </a:t>
+            </a:r>
+            <a:r>
+              <a:rPr lang="en-US" sz="1350" dirty="0">
+                <a:solidFill>
+                  <a:srgbClr val="5B6B73"/>
+                </a:solidFill>
+                <a:latin typeface="Calibri" pitchFamily="34" charset="0"/>
+                <a:ea typeface="Calibri" pitchFamily="34" charset="-122"/>
+                <a:cs typeface="Calibri" pitchFamily="34" charset="-120"/>
+              </a:rPr>
+              <a:t>(2020). </a:t>
+            </a:r>
+            <a:r>
+              <a:rPr lang="en-US" sz="1350" i="1" dirty="0">
+                <a:solidFill>
+                  <a:srgbClr val="16252B"/>
+                </a:solidFill>
+                <a:latin typeface="Calibri" pitchFamily="34" charset="0"/>
+                <a:ea typeface="Calibri" pitchFamily="34" charset="-122"/>
+                <a:cs typeface="Calibri" pitchFamily="34" charset="-120"/>
+              </a:rPr>
+              <a:t>Fundamentals of software architecture: Free chapter </a:t>
+            </a:r>
+            <a:r>
+              <a:rPr lang="en-US" sz="1350" dirty="0">
+                <a:solidFill>
+                  <a:srgbClr val="16252B"/>
+                </a:solidFill>
+                <a:latin typeface="Calibri" pitchFamily="34" charset="0"/>
+                <a:ea typeface="Calibri" pitchFamily="34" charset="-122"/>
+                <a:cs typeface="Calibri" pitchFamily="34" charset="-120"/>
+              </a:rPr>
+              <a:t>[Capítulo de muestra]. ThoughtWorks.</a:t>
+            </a:r>
+            <a:endParaRPr lang="en-US" sz="1350" dirty="0"/>
+          </a:p>
+        </p:txBody>
+      </p:sp>
+      <p:sp>
+        <p:nvSpPr>
+          <p:cNvPr id="10" name="Text 7"/>
+          <p:cNvSpPr/>
+          <p:nvPr/>
+        </p:nvSpPr>
+        <p:spPr>
+          <a:xfrm>
+            <a:off x="1508760" y="2743200"/>
+            <a:ext cx="9875520" cy="365760"/>
+          </a:xfrm>
+          <a:prstGeom prst="rect">
+            <a:avLst/>
+          </a:prstGeom>
+          <a:noFill/>
+          <a:ln/>
+        </p:spPr>
+        <p:txBody>
+          <a:bodyPr wrap="square" lIns="0" tIns="0" rIns="0" bIns="0" rtlCol="0" anchor="t"/>
           <a:lstStyle/>
           <a:p>
             <a:pPr marL="0" indent="0">
               <a:buNone/>
             </a:pPr>
             <a:r>
-              <a:rPr lang="en-US" sz="1150" dirty="0">
-                <a:solidFill>
-                  <a:srgbClr val="BFEFE0"/>
-                </a:solidFill>
-                <a:latin typeface="Calibri" pitchFamily="34" charset="0"/>
-                <a:ea typeface="Calibri" pitchFamily="34" charset="-122"/>
-                <a:cs typeface="Calibri" pitchFamily="34" charset="-120"/>
-              </a:rPr>
-              <a:t>Genérico, estable</a:t>
-            </a:r>
-            <a:endParaRPr lang="en-US" sz="1150" dirty="0"/>
-          </a:p>
-        </p:txBody>
-      </p:sp>
-      <p:sp>
-        <p:nvSpPr>
-          <p:cNvPr id="9" name="Shape 6"/>
-          <p:cNvSpPr/>
-          <p:nvPr/>
-        </p:nvSpPr>
-        <p:spPr>
-          <a:xfrm>
-            <a:off x="4343400" y="3749040"/>
-            <a:ext cx="3383280" cy="1371600"/>
+              <a:rPr lang="en-US" sz="1000" dirty="0">
+                <a:solidFill>
+                  <a:srgbClr val="0E7C7B"/>
+                </a:solidFill>
+                <a:latin typeface="Courier New" pitchFamily="34" charset="0"/>
+                <a:ea typeface="Courier New" pitchFamily="34" charset="-122"/>
+                <a:cs typeface="Courier New" pitchFamily="34" charset="-120"/>
+              </a:rPr>
+              <a:t>https://www.thoughtworks.com/content/dam/thoughtworks/documents/books/bk_Fundamentals_of_Software_Architecture_Free_Chapter_en.pdf</a:t>
+            </a:r>
+            <a:endParaRPr lang="en-US" sz="1000" dirty="0"/>
+          </a:p>
+        </p:txBody>
+      </p:sp>
+      <p:sp>
+        <p:nvSpPr>
+          <p:cNvPr id="11" name="Text 8"/>
+          <p:cNvSpPr/>
+          <p:nvPr/>
+        </p:nvSpPr>
+        <p:spPr>
+          <a:xfrm>
+            <a:off x="1508760" y="3108960"/>
+            <a:ext cx="9601200" cy="502920"/>
+          </a:xfrm>
+          <a:prstGeom prst="rect">
+            <a:avLst/>
+          </a:prstGeom>
+          <a:noFill/>
+          <a:ln/>
+        </p:spPr>
+        <p:txBody>
+          <a:bodyPr wrap="square" lIns="0" tIns="0" rIns="0" bIns="0" rtlCol="0" anchor="t"/>
+          <a:lstStyle/>
+          <a:p>
+            <a:pPr marL="0" indent="0">
+              <a:buNone/>
+            </a:pPr>
+            <a:r>
+              <a:rPr lang="en-US" sz="1100" i="1" dirty="0">
+                <a:solidFill>
+                  <a:srgbClr val="5B6B73"/>
+                </a:solidFill>
+                <a:latin typeface="Calibri" pitchFamily="34" charset="0"/>
+                <a:ea typeface="Calibri" pitchFamily="34" charset="-122"/>
+                <a:cs typeface="Calibri" pitchFamily="34" charset="-120"/>
+              </a:rPr>
+              <a:t>Capítulo gratuito y oficial del libro que dedica un capítulo completo al patrón Microkernel (plug-in architecture).</a:t>
+            </a:r>
+            <a:endParaRPr lang="en-US" sz="1100" dirty="0"/>
+          </a:p>
+        </p:txBody>
+      </p:sp>
+      <p:sp>
+        <p:nvSpPr>
+          <p:cNvPr id="12" name="Shape 9"/>
+          <p:cNvSpPr/>
+          <p:nvPr/>
+        </p:nvSpPr>
+        <p:spPr>
+          <a:xfrm>
+            <a:off x="502920" y="3886200"/>
+            <a:ext cx="11155680" cy="1691640"/>
           </a:xfrm>
           <a:prstGeom prst="roundRect">
             <a:avLst>
-              <a:gd name="adj" fmla="val 5333"/>
+              <a:gd name="adj" fmla="val 4324"/>
             </a:avLst>
           </a:prstGeom>
           <a:solidFill>
-            <a:srgbClr val="10293A"/>
+            <a:srgbClr val="FFFFFF"/>
           </a:solidFill>
           <a:ln/>
           <a:effectLst>
@@ -6691,9 +7761,36 @@
           </a:p>
         </p:txBody>
       </p:sp>
+      <p:sp>
+        <p:nvSpPr>
+          <p:cNvPr id="13" name="Shape 10"/>
+          <p:cNvSpPr/>
+          <p:nvPr/>
+        </p:nvSpPr>
+        <p:spPr>
+          <a:xfrm>
+            <a:off x="502920" y="3886200"/>
+            <a:ext cx="73152" cy="1691640"/>
+          </a:xfrm>
+          <a:prstGeom prst="roundRect">
+            <a:avLst/>
+          </a:prstGeom>
+          <a:solidFill>
+            <a:srgbClr val="0E7C7B"/>
+          </a:solidFill>
+          <a:ln/>
+        </p:spPr>
+        <p:txBody>
+          <a:bodyPr/>
+          <a:lstStyle/>
+          <a:p>
+            <a:endParaRPr lang="en-US"/>
+          </a:p>
+        </p:txBody>
+      </p:sp>
       <p:pic>
         <p:nvPicPr>
-          <p:cNvPr id="10" name="Image 1" descr="icon_puzzle.png"/>
+          <p:cNvPr id="14" name="Image 1" descr="icon_code.png"/>
           <p:cNvPicPr>
             <a:picLocks noChangeAspect="1"/>
           </p:cNvPicPr>
@@ -6707,8 +7804,8 @@
         </p:blipFill>
         <p:spPr>
           <a:xfrm>
-            <a:off x="4617720" y="4023360"/>
-            <a:ext cx="457200" cy="457200"/>
+            <a:off x="868680" y="4123944"/>
+            <a:ext cx="420624" cy="420624"/>
           </a:xfrm>
           <a:prstGeom prst="rect">
             <a:avLst/>
@@ -6717,256 +7814,154 @@
       </p:pic>
       <p:sp>
         <p:nvSpPr>
-          <p:cNvPr id="11" name="Text 7"/>
-          <p:cNvSpPr/>
-          <p:nvPr/>
-        </p:nvSpPr>
-        <p:spPr>
-          <a:xfrm>
-            <a:off x="5212080" y="3977640"/>
-            <a:ext cx="2286000" cy="365760"/>
-          </a:xfrm>
-          <a:prstGeom prst="rect">
-            <a:avLst/>
-          </a:prstGeom>
-          <a:noFill/>
-          <a:ln/>
-        </p:spPr>
-        <p:txBody>
-          <a:bodyPr wrap="square" lIns="0" tIns="0" rIns="0" bIns="0" rtlCol="0" anchor="ctr"/>
+          <p:cNvPr id="15" name="Text 11"/>
+          <p:cNvSpPr/>
+          <p:nvPr/>
+        </p:nvSpPr>
+        <p:spPr>
+          <a:xfrm>
+            <a:off x="1508760" y="4023360"/>
+            <a:ext cx="9875520" cy="457200"/>
+          </a:xfrm>
+          <a:prstGeom prst="rect">
+            <a:avLst/>
+          </a:prstGeom>
+          <a:noFill/>
+          <a:ln/>
+        </p:spPr>
+        <p:txBody>
+          <a:bodyPr wrap="square" lIns="0" tIns="0" rIns="0" bIns="0" rtlCol="0" anchor="t"/>
           <a:lstStyle/>
           <a:p>
             <a:pPr marL="0" indent="0">
-              <a:buNone/>
-            </a:pPr>
-            <a:r>
-              <a:rPr lang="en-US" sz="1450" b="1" dirty="0">
-                <a:solidFill>
-                  <a:srgbClr val="FFFFFF"/>
-                </a:solidFill>
-                <a:latin typeface="Calibri" pitchFamily="34" charset="0"/>
-                <a:ea typeface="Calibri" pitchFamily="34" charset="-122"/>
-                <a:cs typeface="Calibri" pitchFamily="34" charset="-120"/>
-              </a:rPr>
-              <a:t>Plugins</a:t>
-            </a:r>
-            <a:endParaRPr lang="en-US" sz="1450" dirty="0"/>
-          </a:p>
-        </p:txBody>
-      </p:sp>
-      <p:sp>
-        <p:nvSpPr>
-          <p:cNvPr id="12" name="Text 8"/>
-          <p:cNvSpPr/>
-          <p:nvPr/>
-        </p:nvSpPr>
-        <p:spPr>
-          <a:xfrm>
-            <a:off x="5212080" y="4315968"/>
-            <a:ext cx="2286000" cy="365760"/>
-          </a:xfrm>
-          <a:prstGeom prst="rect">
-            <a:avLst/>
-          </a:prstGeom>
-          <a:noFill/>
-          <a:ln/>
-        </p:spPr>
-        <p:txBody>
-          <a:bodyPr wrap="square" lIns="0" tIns="0" rIns="0" bIns="0" rtlCol="0" anchor="ctr"/>
+              <a:lnSpc>
+                <a:spcPct val="115000"/>
+              </a:lnSpc>
+              <a:buNone/>
+            </a:pPr>
+            <a:r>
+              <a:rPr lang="en-US" sz="1350" b="1" dirty="0">
+                <a:solidFill>
+                  <a:srgbClr val="16252B"/>
+                </a:solidFill>
+                <a:latin typeface="Calibri" pitchFamily="34" charset="0"/>
+                <a:ea typeface="Calibri" pitchFamily="34" charset="-122"/>
+                <a:cs typeface="Calibri" pitchFamily="34" charset="-120"/>
+              </a:rPr>
+              <a:t>Microsoft. </a:t>
+            </a:r>
+            <a:r>
+              <a:rPr lang="en-US" sz="1350" dirty="0">
+                <a:solidFill>
+                  <a:srgbClr val="5B6B73"/>
+                </a:solidFill>
+                <a:latin typeface="Calibri" pitchFamily="34" charset="0"/>
+                <a:ea typeface="Calibri" pitchFamily="34" charset="-122"/>
+                <a:cs typeface="Calibri" pitchFamily="34" charset="-120"/>
+              </a:rPr>
+              <a:t>(2024). </a:t>
+            </a:r>
+            <a:r>
+              <a:rPr lang="en-US" sz="1350" i="1" dirty="0">
+                <a:solidFill>
+                  <a:srgbClr val="16252B"/>
+                </a:solidFill>
+                <a:latin typeface="Calibri" pitchFamily="34" charset="0"/>
+                <a:ea typeface="Calibri" pitchFamily="34" charset="-122"/>
+                <a:cs typeface="Calibri" pitchFamily="34" charset="-120"/>
+              </a:rPr>
+              <a:t>Dependency injection in ASP.NET Core. </a:t>
+            </a:r>
+            <a:r>
+              <a:rPr lang="en-US" sz="1350" dirty="0">
+                <a:solidFill>
+                  <a:srgbClr val="16252B"/>
+                </a:solidFill>
+                <a:latin typeface="Calibri" pitchFamily="34" charset="0"/>
+                <a:ea typeface="Calibri" pitchFamily="34" charset="-122"/>
+                <a:cs typeface="Calibri" pitchFamily="34" charset="-120"/>
+              </a:rPr>
+              <a:t>Microsoft Learn.</a:t>
+            </a:r>
+            <a:endParaRPr lang="en-US" sz="1350" dirty="0"/>
+          </a:p>
+        </p:txBody>
+      </p:sp>
+      <p:sp>
+        <p:nvSpPr>
+          <p:cNvPr id="16" name="Text 12"/>
+          <p:cNvSpPr/>
+          <p:nvPr/>
+        </p:nvSpPr>
+        <p:spPr>
+          <a:xfrm>
+            <a:off x="1508760" y="4480560"/>
+            <a:ext cx="9875520" cy="365760"/>
+          </a:xfrm>
+          <a:prstGeom prst="rect">
+            <a:avLst/>
+          </a:prstGeom>
+          <a:noFill/>
+          <a:ln/>
+        </p:spPr>
+        <p:txBody>
+          <a:bodyPr wrap="square" lIns="0" tIns="0" rIns="0" bIns="0" rtlCol="0" anchor="t"/>
           <a:lstStyle/>
           <a:p>
             <a:pPr marL="0" indent="0">
               <a:buNone/>
             </a:pPr>
             <a:r>
-              <a:rPr lang="en-US" sz="1150" dirty="0">
-                <a:solidFill>
-                  <a:srgbClr val="BFEFE0"/>
-                </a:solidFill>
-                <a:latin typeface="Calibri" pitchFamily="34" charset="0"/>
-                <a:ea typeface="Calibri" pitchFamily="34" charset="-122"/>
-                <a:cs typeface="Calibri" pitchFamily="34" charset="-120"/>
-              </a:rPr>
-              <a:t>Independientes</a:t>
-            </a:r>
-            <a:endParaRPr lang="en-US" sz="1150" dirty="0"/>
-          </a:p>
-        </p:txBody>
-      </p:sp>
-      <p:sp>
-        <p:nvSpPr>
-          <p:cNvPr id="13" name="Shape 9"/>
-          <p:cNvSpPr/>
-          <p:nvPr/>
-        </p:nvSpPr>
-        <p:spPr>
-          <a:xfrm>
-            <a:off x="7909560" y="3749040"/>
-            <a:ext cx="3383280" cy="1371600"/>
-          </a:xfrm>
-          <a:prstGeom prst="roundRect">
-            <a:avLst>
-              <a:gd name="adj" fmla="val 5333"/>
-            </a:avLst>
-          </a:prstGeom>
-          <a:solidFill>
-            <a:srgbClr val="10293A"/>
-          </a:solidFill>
-          <a:ln/>
-          <a:effectLst>
-            <a:outerShdw blurRad="101600" dist="25400" dir="5400000" algn="bl" rotWithShape="0">
-              <a:srgbClr val="000000">
-                <a:alpha val="12000"/>
-              </a:srgbClr>
-            </a:outerShdw>
-          </a:effectLst>
-        </p:spPr>
-        <p:txBody>
-          <a:bodyPr/>
-          <a:lstStyle/>
-          <a:p>
-            <a:endParaRPr lang="en-US"/>
-          </a:p>
-        </p:txBody>
-      </p:sp>
-      <p:pic>
-        <p:nvPicPr>
-          <p:cNvPr id="14" name="Image 2" descr="icon_exchange_white.png"/>
-          <p:cNvPicPr>
-            <a:picLocks noChangeAspect="1"/>
-          </p:cNvPicPr>
-          <p:nvPr/>
-        </p:nvPicPr>
-        <p:blipFill>
-          <a:blip r:embed="rId5"/>
-          <a:stretch>
-            <a:fillRect/>
-          </a:stretch>
-        </p:blipFill>
-        <p:spPr>
-          <a:xfrm>
-            <a:off x="8183880" y="4023360"/>
-            <a:ext cx="457200" cy="457200"/>
-          </a:xfrm>
-          <a:prstGeom prst="rect">
-            <a:avLst/>
-          </a:prstGeom>
-        </p:spPr>
-      </p:pic>
-      <p:sp>
-        <p:nvSpPr>
-          <p:cNvPr id="15" name="Text 10"/>
-          <p:cNvSpPr/>
-          <p:nvPr/>
-        </p:nvSpPr>
-        <p:spPr>
-          <a:xfrm>
-            <a:off x="8778240" y="3977640"/>
-            <a:ext cx="2286000" cy="365760"/>
-          </a:xfrm>
-          <a:prstGeom prst="rect">
-            <a:avLst/>
-          </a:prstGeom>
-          <a:noFill/>
-          <a:ln/>
-        </p:spPr>
-        <p:txBody>
-          <a:bodyPr wrap="square" lIns="0" tIns="0" rIns="0" bIns="0" rtlCol="0" anchor="ctr"/>
+              <a:rPr lang="en-US" sz="1000" dirty="0">
+                <a:solidFill>
+                  <a:srgbClr val="0E7C7B"/>
+                </a:solidFill>
+                <a:latin typeface="Courier New" pitchFamily="34" charset="0"/>
+                <a:ea typeface="Courier New" pitchFamily="34" charset="-122"/>
+                <a:cs typeface="Courier New" pitchFamily="34" charset="-120"/>
+              </a:rPr>
+              <a:t>https://learn.microsoft.com/aspnet/core/fundamentals/dependency-injection</a:t>
+            </a:r>
+            <a:endParaRPr lang="en-US" sz="1000" dirty="0"/>
+          </a:p>
+        </p:txBody>
+      </p:sp>
+      <p:sp>
+        <p:nvSpPr>
+          <p:cNvPr id="17" name="Text 13"/>
+          <p:cNvSpPr/>
+          <p:nvPr/>
+        </p:nvSpPr>
+        <p:spPr>
+          <a:xfrm>
+            <a:off x="1508760" y="4846320"/>
+            <a:ext cx="9601200" cy="548640"/>
+          </a:xfrm>
+          <a:prstGeom prst="rect">
+            <a:avLst/>
+          </a:prstGeom>
+          <a:noFill/>
+          <a:ln/>
+        </p:spPr>
+        <p:txBody>
+          <a:bodyPr wrap="square" lIns="0" tIns="0" rIns="0" bIns="0" rtlCol="0" anchor="t"/>
           <a:lstStyle/>
           <a:p>
             <a:pPr marL="0" indent="0">
               <a:buNone/>
             </a:pPr>
             <a:r>
-              <a:rPr lang="en-US" sz="1450" b="1" dirty="0">
-                <a:solidFill>
-                  <a:srgbClr val="FFFFFF"/>
-                </a:solidFill>
-                <a:latin typeface="Calibri" pitchFamily="34" charset="0"/>
-                <a:ea typeface="Calibri" pitchFamily="34" charset="-122"/>
-                <a:cs typeface="Calibri" pitchFamily="34" charset="-120"/>
-              </a:rPr>
-              <a:t>Controller</a:t>
-            </a:r>
-            <a:endParaRPr lang="en-US" sz="1450" dirty="0"/>
-          </a:p>
-        </p:txBody>
-      </p:sp>
-      <p:sp>
-        <p:nvSpPr>
-          <p:cNvPr id="16" name="Text 11"/>
-          <p:cNvSpPr/>
-          <p:nvPr/>
-        </p:nvSpPr>
-        <p:spPr>
-          <a:xfrm>
-            <a:off x="8778240" y="4315968"/>
-            <a:ext cx="2286000" cy="365760"/>
-          </a:xfrm>
-          <a:prstGeom prst="rect">
-            <a:avLst/>
-          </a:prstGeom>
-          <a:noFill/>
-          <a:ln/>
-        </p:spPr>
-        <p:txBody>
-          <a:bodyPr wrap="square" lIns="0" tIns="0" rIns="0" bIns="0" rtlCol="0" anchor="ctr"/>
-          <a:lstStyle/>
-          <a:p>
-            <a:pPr marL="0" indent="0">
-              <a:buNone/>
-            </a:pPr>
-            <a:r>
-              <a:rPr lang="en-US" sz="1150" dirty="0">
-                <a:solidFill>
-                  <a:srgbClr val="BFEFE0"/>
-                </a:solidFill>
-                <a:latin typeface="Calibri" pitchFamily="34" charset="0"/>
-                <a:ea typeface="Calibri" pitchFamily="34" charset="-122"/>
-                <a:cs typeface="Calibri" pitchFamily="34" charset="-120"/>
-              </a:rPr>
-              <a:t>Solo traduce HTTP</a:t>
-            </a:r>
-            <a:endParaRPr lang="en-US" sz="1150" dirty="0"/>
-          </a:p>
-        </p:txBody>
-      </p:sp>
-      <p:sp>
-        <p:nvSpPr>
-          <p:cNvPr id="17" name="Text 12"/>
-          <p:cNvSpPr/>
-          <p:nvPr/>
-        </p:nvSpPr>
-        <p:spPr>
-          <a:xfrm>
-            <a:off x="777240" y="5623560"/>
-            <a:ext cx="5486400" cy="548640"/>
-          </a:xfrm>
-          <a:prstGeom prst="rect">
-            <a:avLst/>
-          </a:prstGeom>
-          <a:noFill/>
-          <a:ln/>
-        </p:spPr>
-        <p:txBody>
-          <a:bodyPr wrap="square" lIns="0" tIns="0" rIns="0" bIns="0" rtlCol="0" anchor="ctr"/>
-          <a:lstStyle/>
-          <a:p>
-            <a:pPr marL="0" indent="0">
-              <a:buNone/>
-            </a:pPr>
-            <a:r>
-              <a:rPr lang="en-US" sz="2400" b="1" dirty="0">
-                <a:solidFill>
-                  <a:srgbClr val="02C39A"/>
-                </a:solidFill>
-                <a:latin typeface="Cambria" pitchFamily="34" charset="0"/>
-                <a:ea typeface="Cambria" pitchFamily="34" charset="-122"/>
-                <a:cs typeface="Cambria" pitchFamily="34" charset="-120"/>
-              </a:rPr>
-              <a:t>Gracias</a:t>
-            </a:r>
-            <a:endParaRPr lang="en-US" sz="2400" dirty="0"/>
+              <a:rPr lang="en-US" sz="1100" i="1" dirty="0">
+                <a:solidFill>
+                  <a:srgbClr val="5B6B73"/>
+                </a:solidFill>
+                <a:latin typeface="Calibri" pitchFamily="34" charset="0"/>
+                <a:ea typeface="Calibri" pitchFamily="34" charset="-122"/>
+                <a:cs typeface="Calibri" pitchFamily="34" charset="-120"/>
+              </a:rPr>
+              <a:t>Documentación oficial que sustenta el uso de AddSingleton&lt;PluginManager&gt; en Program.cs para ensamblar el núcleo y sus plugins.</a:t>
+            </a:r>
+            <a:endParaRPr lang="en-US" sz="1100" dirty="0"/>
           </a:p>
         </p:txBody>
       </p:sp>
